--- a/05_Extintores.pptx
+++ b/05_Extintores.pptx
@@ -511,7 +511,7 @@
           <a:lstStyle/>
           <a:p>
             <a:r>
-              <a:t>Bem-vindos à aula sobre extintores de incêndio. Vamos aprender sobre os tipos de incêndio, as classes de fogo, os agentes extintores corretos para cada situação e como utilizar um extintor de forma segura e eficiente.</a:t>
+              <a:t>Bem-vindos à aula sobre extintores de incêndio. Vamos aprender sobre os tipos de incêndio, as classes de fogo, os agentes extintores corretos para cada situação e como usar um extintor de forma segura com a técnica PASS.</a:t>
             </a:r>
           </a:p>
         </p:txBody>
@@ -581,7 +581,7 @@
           <a:lstStyle/>
           <a:p>
             <a:r>
-              <a:t>Vamos revisar os pontos essenciais sobre extintores de incêndio. O fogo precisa de três elementos e remover qualquer um deles o extingue. Lembre as quatro classes de incêndio e nunca use água em fogo elétrico ou de líquidos. Use a técnica PASS: puxar o pino, apontar para a base, apertar o gatilho e varrer. Faça inspeção visual mensal e manutenção anual com empresa credenciada. Mantenha os extintores nas distâncias corretas e o acesso sempre livre. Após qualquer uso, recarregue imediatamente. Segurança começa na prevenção.</a:t>
+              <a:t>Vamos revisar os pontos essenciais sobre extintores. O fogo precisa de três elementos e eliminar qualquer um deles o extingue. Lembre as cinco classes de incêndio e nunca use água em fogo elétrico, de líquidos ou de gordura quente. Use sempre a técnica PASS: puxar, apontar para a base, apertar e varrer. Mantenha os extintores inspecionados mensalmente e com manutenção anual. Respeite as distâncias máximas e mantenha o acesso sempre livre. Após qualquer uso, recarregue imediatamente. Segurança contra incêndio começa na prevenção.</a:t>
             </a:r>
           </a:p>
         </p:txBody>
@@ -651,7 +651,7 @@
           <a:lstStyle/>
           <a:p>
             <a:r>
-              <a:t>O fogo é resultado da combinação de três elementos: combustível, comburente e calor, formando o chamado triângulo do fogo. Para apagar um incêndio, basta eliminar um desses elementos. O extintor age principalmente resfriando ou abafando o fogo e, no caso dos pós químicos, também interrompendo a reação em cadeia.</a:t>
+              <a:t>O fogo resulta da combinação de três elementos: combustível, comburente e calor. Para apagá-lo, basta eliminar um desses elementos. O conceito moderno inclui um quarto elemento, a reação em cadeia, formando o Tetraedro do Fogo. Os extintores podem agir por resfriamento, abafamento, isolamento do combustível ou interrupção da reação em cadeia, dependendo do tipo de agente extintor.</a:t>
             </a:r>
           </a:p>
         </p:txBody>
@@ -721,7 +721,7 @@
           <a:lstStyle/>
           <a:p>
             <a:r>
-              <a:t>Os incêndios são classificados em quatro classes principais. Classe A são os sólidos que formam brasa, como madeira e papel — usa-se água ou pó ABC. Classe B são líquidos e gases inflamáveis — nunca use água, pois pode espirrar o líquido. Use pó ou CO2. Classe C são equipamentos elétricos energizados — nunca use água por risco de choque; use pó seco ou CO2. Classe D são metais combustíveis que exigem pó especial específico para cada metal.</a:t>
+              <a:t>Os incêndios são classificados em cinco classes principais. Classe A são os sólidos que formam brasa: use água ou pó ABC. Classe B são líquidos e gases inflamáveis: nunca use água, que pode espirrar o líquido em chamas. Classe C são equipamentos elétricos energizados: nunca use água por risco de choque. Classe D são metais combustíveis raros que exigem pó especial específico. Classe K são óleos e gorduras de cozinha em alta temperatura: nunca use água, pois o vapor explosivo pode projetar óleo incandescente.</a:t>
             </a:r>
           </a:p>
         </p:txBody>
@@ -791,7 +791,7 @@
           <a:lstStyle/>
           <a:p>
             <a:r>
-              <a:t>Existem vários tipos de agentes extintores. O extintor de água age por resfriamento e serve apenas para a classe A. O pó químico seco BC combate as classes B e C. O pó ABC é o mais versátil, cobrindo as três classes principais. O CO2 é ideal para equipamentos eletrônicos pois não deixa resíduo, mas atenção: em espaços confinados pode causar asfixia. A espuma é usada para líquidos inflamáveis em grandes volumes.</a:t>
+              <a:t>Os principais tipos de extintores diferem pelo agente extintor que utilizam. O de água age por resfriamento e serve apenas para a Classe A. O pó BC combate as classes B e C interrompendo a reação em cadeia. O pó ABC é o mais versátil, cobrindo as três classes mais comuns. O CO2 é ideal para equipamentos eletrônicos e ambientes de TI pois não deixa resíduo, mas atenção: em espaços fechados pode causar asfixia. A espuma é usada para grandes volumes de líquidos inflamáveis.</a:t>
             </a:r>
           </a:p>
         </p:txBody>
@@ -861,7 +861,7 @@
           <a:lstStyle/>
           <a:p>
             <a:r>
-              <a:t>A escolha do extintor correto é fundamental para a eficácia e segurança. Para sólidos como papel e madeira, use água ou pó ABC. Para líquidos e gases inflamáveis, use pó BC, ABC ou CO2, nunca água. Para equipamentos elétricos energizados, use pó seco ou CO2, nunca água. Para servidores e computadores, prefira CO2 por não deixar resíduo. Sempre leia o rótulo do extintor — ele indica as classes para as quais é adequado.</a:t>
+              <a:t>A escolha correta do extintor é fundamental para a eficácia e para a segurança do operador. Para sólidos com brasa, como papel e madeira, use água ou pó ABC. Para líquidos e gases inflamáveis, use pó BC, ABC ou CO2, nunca água. Para equipamentos elétricos energizados, use pó seco ou CO2, nunca água. Para servidores e computadores, prefira CO2 por não deixar resíduo de pó. Para óleos de cozinha quentes, use apenas o extintor específico de pó úmido para Classe K. Sempre leia o rótulo do extintor antes de usá-lo.</a:t>
             </a:r>
           </a:p>
         </p:txBody>
@@ -931,7 +931,7 @@
           <a:lstStyle/>
           <a:p>
             <a:r>
-              <a:t>A técnica PASS é o método padrão para uso de extintores. P de puxar o pino de segurança. A de apontar o bico para a base das chamas, nunca para o topo, pois o fogo começa embaixo. S de apertar o gatilho. E o segundo S de varrer da esquerda para a direita cobrindo toda a base. Mantenha a distância indicada no rótulo, fique com o vento nas costas para o agente extintor não voltar em sua direção e sempre tenha uma rota de fuga.</a:t>
+              <a:t>A técnica PASS é o método padrão internacional para uso de extintores. P de Puxar o pino de segurança que impede o acionamento acidental. A de Apontar o bico para a base das chamas, nunca para o topo, pois é na base que está o combustível. S de Apertar o gatilho com firmeza e de forma contínua. S de Varrer o jato da esquerda para a direita cobrindo toda a base. Posicione-se sempre com o vento nas costas e mantenha uma rota de fuga livre.</a:t>
             </a:r>
           </a:p>
         </p:txBody>
@@ -1001,7 +1001,7 @@
           <a:lstStyle/>
           <a:p>
             <a:r>
-              <a:t>Os extintores exigem manutenção regular. A inspeção visual mensal deve ser feita por funcionário treinado verificando o lacre, a pressão no manômetro — que deve estar na zona verde — e se o extintor está acessível e sem obstruções. A manutenção anual deve ser realizada por empresa credenciada pelo INMETRO. O teste hidrostático do cilindro ocorre a cada cinco anos. Após qualquer uso, mesmo que parcial, o extintor deve ser imediatamente recarregado.</a:t>
+              <a:t>A manutenção regular dos extintores é tão importante quanto saber usá-los. A inspeção visual mensal deve ser feita por funcionário treinado, verificando o lacre, a pressão no manômetro, que deve estar na zona verde, e se o extintor está acessível e sinalizado. A manutenção anual deve ser realizada por empresa credenciada pelo INMETRO, que realiza verificação interna, recarga e emite laudo técnico. O teste hidrostático do cilindro é obrigatório a cada cinco anos. Após qualquer uso, mesmo que parcial, o extintor deve ser recarregado imediatamente.</a:t>
             </a:r>
           </a:p>
         </p:txBody>
@@ -1071,7 +1071,7 @@
           <a:lstStyle/>
           <a:p>
             <a:r>
-              <a:t>A NR-23 e a NBR 12693 definem onde e como posicionar os extintores. A parte inferior do extintor deve estar a no máximo um metro e sessenta do piso para facilitar o acesso rápido. A distância máxima a percorrer é de quinze metros para incêndios classe A e dez metros para as classes B e C. A sinalização com placa fotoluminescente é obrigatória e o acesso deve ser sempre livre. A quantidade de extintores é calculada em função da área e do risco do ambiente.</a:t>
+              <a:t>A NR-23 e a NBR doze mil seiscentos e noventa e três definem como posicionar os extintores. A parte inferior deve estar a no máximo um metro e sessenta do piso. Para incêndios da Classe A, a distância máxima a percorrer é quinze metros. Para as Classes B e C, dez metros, dada a maior velocidade de propagação. A sinalização com placa fotoluminescente é obrigatória acima de cada extintor. O acesso deve ser sempre livre — nunca posicione móveis ou caixas na frente do extintor.</a:t>
             </a:r>
           </a:p>
         </p:txBody>
@@ -1141,7 +1141,7 @@
           <a:lstStyle/>
           <a:p>
             <a:r>
-              <a:t>A Norma Regulamentadora número 23 trata da proteção contra incêndios. O empregador é responsável por manter saídas de emergência desobstruídas, disponibilizar extintores adequados, treinar todos os funcionários no uso correto dos equipamentos e manter uma brigada de incêndio conforme o porte da empresa. Simulados periódicos são obrigatórios para garantir que todos saibam agir em caso de emergência. A fiscalização é realizada pelo Corpo de Bombeiros e pelo Ministério do Trabalho e Emprego.</a:t>
+              <a:t>A NR-23 trata da proteção contra incêndios no ambiente de trabalho. O empregador deve garantir saídas de emergência sempre livres e sinalizadas, extintores adequados ao tipo de risco de cada área, e manter uma brigada de incêndio formada por funcionários treinados. O treinamento da brigada deve ser anual com simulado prático. O Plano de Prevenção e Proteção Contra Incêndios deve ser aprovado pelo Corpo de Bombeiros Militar de cada estado.</a:t>
             </a:r>
           </a:p>
         </p:txBody>
@@ -4155,8 +4155,8 @@
         </p:nvSpPr>
         <p:spPr>
           <a:xfrm>
-            <a:off x="548640" y="1828800"/>
-            <a:ext cx="11091672" cy="1371600"/>
+            <a:off x="548640" y="1645920"/>
+            <a:ext cx="11091672" cy="1645920"/>
           </a:xfrm>
           <a:prstGeom prst="rect">
             <a:avLst/>
@@ -4176,7 +4176,18 @@
                   <a:srgbClr val="1A56DB"/>
                 </a:solidFill>
               </a:rPr>
-              <a:t>Extintores de Incêndio — Prevenção e Combate</a:t>
+              <a:t>Extintores de Incêndio</a:t>
+            </a:r>
+          </a:p>
+          <a:p>
+            <a:pPr algn="ctr"/>
+            <a:r>
+              <a:rPr sz="4000" b="1">
+                <a:solidFill>
+                  <a:srgbClr val="1A56DB"/>
+                </a:solidFill>
+              </a:rPr>
+              <a:t>Prevenção e Combate</a:t>
             </a:r>
           </a:p>
         </p:txBody>
@@ -4189,8 +4200,8 @@
         </p:nvSpPr>
         <p:spPr>
           <a:xfrm>
-            <a:off x="548640" y="3383280"/>
-            <a:ext cx="11091672" cy="502920"/>
+            <a:off x="548640" y="3474720"/>
+            <a:ext cx="11091672" cy="548640"/>
           </a:xfrm>
           <a:prstGeom prst="rect">
             <a:avLst/>
@@ -4223,8 +4234,8 @@
         </p:nvSpPr>
         <p:spPr>
           <a:xfrm>
-            <a:off x="548640" y="3886200"/>
-            <a:ext cx="11091672" cy="502920"/>
+            <a:off x="548640" y="4023360"/>
+            <a:ext cx="11091672" cy="548640"/>
           </a:xfrm>
           <a:prstGeom prst="rect">
             <a:avLst/>
@@ -4296,7 +4307,7 @@
                   <a:srgbClr val="1A56DB"/>
                 </a:solidFill>
               </a:rPr>
-              <a:t>Resumo — O que Você Precisa Saber sobre Extintores</a:t>
+              <a:t>Resumo — O que Saber sobre Extintores</a:t>
             </a:r>
           </a:p>
         </p:txBody>
@@ -4330,7 +4341,7 @@
                   <a:srgbClr val="111827"/>
                 </a:solidFill>
               </a:rPr>
-              <a:t>✅ Fogo = Combustível + Comburente + Calor — remova um para extinguir.</a:t>
+              <a:t>Triangulo do Fogo: Combustivel + Comburente + Calor — remova 1 e extingue.</a:t>
             </a:r>
           </a:p>
         </p:txBody>
@@ -4364,7 +4375,7 @@
                   <a:srgbClr val="111827"/>
                 </a:solidFill>
               </a:rPr>
-              <a:t>✅ 4 classes: A (sólidos) · B (líquidos/gases) · C (elétrico) · D (metais).</a:t>
+              <a:t>Classes: A (solidos) · B (liquidos/gases) · C (eletrico) · D (metais) · K (oleo).</a:t>
             </a:r>
           </a:p>
         </p:txBody>
@@ -4398,7 +4409,7 @@
                   <a:srgbClr val="111827"/>
                 </a:solidFill>
               </a:rPr>
-              <a:t>✅ NUNCA use água em incêndios classe B ou C.</a:t>
+              <a:t>NUNCA use agua em Classes B, C ou K.</a:t>
             </a:r>
           </a:p>
         </p:txBody>
@@ -4432,7 +4443,7 @@
                   <a:srgbClr val="111827"/>
                 </a:solidFill>
               </a:rPr>
-              <a:t>✅ Técnica PASS: Puxar · Apontar (base) · Apertar · Varrer.</a:t>
+              <a:t>Tecnica PASS: Puxar pino · Apontar base · Apertar gatilho · Varrer.</a:t>
             </a:r>
           </a:p>
         </p:txBody>
@@ -4466,7 +4477,7 @@
                   <a:srgbClr val="111827"/>
                 </a:solidFill>
               </a:rPr>
-              <a:t>✅ Inspeção mensal + manutenção anual por empresa credenciada.</a:t>
+              <a:t>Inspecao mensal + manutencao anual (INMETRO) + hidrostatico a cada 5 anos.</a:t>
             </a:r>
           </a:p>
         </p:txBody>
@@ -4500,7 +4511,7 @@
                   <a:srgbClr val="111827"/>
                 </a:solidFill>
               </a:rPr>
-              <a:t>✅ Distância: 15 m (Cl. A) / 10 m (Cl. B e C) — acesso sempre livre.</a:t>
+              <a:t>Distancias: 15 m (Cl.A) / 10 m (Cl.B e C) — acesso livre, sinalizado.</a:t>
             </a:r>
           </a:p>
         </p:txBody>
@@ -4534,7 +4545,7 @@
                   <a:srgbClr val="111827"/>
                 </a:solidFill>
               </a:rPr>
-              <a:t>✅ Após qualquer uso — recarregue imediatamente.</a:t>
+              <a:t>Apos qualquer uso: recarregar imediatamente.</a:t>
             </a:r>
           </a:p>
         </p:txBody>
@@ -4620,7 +4631,7 @@
                   <a:srgbClr val="111827"/>
                 </a:solidFill>
               </a:rPr>
-              <a:t>O fogo precisa de TRÊS elementos simultâneos:</a:t>
+              <a:t>O fogo precisa de TRES elementos simultâneos:</a:t>
             </a:r>
           </a:p>
         </p:txBody>
@@ -4654,7 +4665,7 @@
                   <a:srgbClr val="111827"/>
                 </a:solidFill>
               </a:rPr>
-              <a:t>  🔥 COMBUSTÍVEL — material que queima (madeira, papel, gasolina, gás).</a:t>
+              <a:t>  COMBUSTIVEL — material que queima (madeira, papel, gasolina, gás).</a:t>
             </a:r>
           </a:p>
         </p:txBody>
@@ -4688,7 +4699,7 @@
                   <a:srgbClr val="111827"/>
                 </a:solidFill>
               </a:rPr>
-              <a:t>  💨 COMBURENTE — oxigênio do ar (mínimo ~16% para sustentar chama).</a:t>
+              <a:t>  COMBURENTE — oxigênio do ar (mínimo ~16% para sustentar chama).</a:t>
             </a:r>
           </a:p>
         </p:txBody>
@@ -4722,7 +4733,7 @@
                   <a:srgbClr val="111827"/>
                 </a:solidFill>
               </a:rPr>
-              <a:t>  ⚡ CALOR (energia de ativação) — fonte de ignição (faísca, chama, atrito).</a:t>
+              <a:t>  CALOR (energia de ativação) — fonte de ignição (faísca, chama, atrito).</a:t>
             </a:r>
           </a:p>
         </p:txBody>
@@ -4756,7 +4767,7 @@
                   <a:srgbClr val="111827"/>
                 </a:solidFill>
               </a:rPr>
-              <a:t>Remover QUALQUER um dos três elementos extingue o incêndio.</a:t>
+              <a:t>O Tetraedro do Fogo acrescenta um 4° elemento: REACAO EM CADEIA.</a:t>
             </a:r>
           </a:p>
         </p:txBody>
@@ -4790,7 +4801,41 @@
                   <a:srgbClr val="111827"/>
                 </a:solidFill>
               </a:rPr>
-              <a:t>⚠️  Incêndio nunca começa sozinho — identifique e elimine o risco antes.</a:t>
+              <a:t>Remover QUALQUER elemento extingue o incêndio.</a:t>
+            </a:r>
+          </a:p>
+        </p:txBody>
+      </p:sp>
+      <p:sp>
+        <p:nvSpPr>
+          <p:cNvPr id="9" name="TextBox 8"/>
+          <p:cNvSpPr txBox="1"/>
+          <p:nvPr/>
+        </p:nvSpPr>
+        <p:spPr>
+          <a:xfrm>
+            <a:off x="548640" y="4325112"/>
+            <a:ext cx="11091672" cy="548640"/>
+          </a:xfrm>
+          <a:prstGeom prst="rect">
+            <a:avLst/>
+          </a:prstGeom>
+          <a:noFill/>
+        </p:spPr>
+        <p:txBody>
+          <a:bodyPr wrap="square">
+            <a:spAutoFit/>
+          </a:bodyPr>
+          <a:lstStyle/>
+          <a:p>
+            <a:pPr algn="l"/>
+            <a:r>
+              <a:rPr sz="1800" b="0">
+                <a:solidFill>
+                  <a:srgbClr val="111827"/>
+                </a:solidFill>
+              </a:rPr>
+              <a:t>Principio da extincao: resfriar, abafar, isolar ou interromper a reacao.</a:t>
             </a:r>
           </a:p>
         </p:txBody>
@@ -4876,7 +4921,7 @@
                   <a:srgbClr val="111827"/>
                 </a:solidFill>
               </a:rPr>
-              <a:t>CLASSE A — Sólidos com brasas: madeira, papel, tecido, borracha.</a:t>
+              <a:t>CLASSE A — Solidos com brasa residual: madeira, papel, tecido, borracha.</a:t>
             </a:r>
           </a:p>
         </p:txBody>
@@ -4910,7 +4955,7 @@
                   <a:srgbClr val="111827"/>
                 </a:solidFill>
               </a:rPr>
-              <a:t>           Agente: ÁGUA ou pó ABC. Extinção por resfriamento.</a:t>
+              <a:t>   Agente: AGUA ou po ABC. Extincao por resfriamento.</a:t>
             </a:r>
           </a:p>
         </p:txBody>
@@ -4944,7 +4989,7 @@
                   <a:srgbClr val="111827"/>
                 </a:solidFill>
               </a:rPr>
-              <a:t>CLASSE B — Líquidos e gases inflamáveis: gasolina, álcool, GLP.</a:t>
+              <a:t>CLASSE B — Líquidos e gases inflamaveis: gasolina, alcool, GLP.</a:t>
             </a:r>
           </a:p>
         </p:txBody>
@@ -4978,7 +5023,7 @@
                   <a:srgbClr val="111827"/>
                 </a:solidFill>
               </a:rPr>
-              <a:t>           Agente: PÓ BC ou ABC, CO₂, espuma. NUNCA use água.</a:t>
+              <a:t>   Agente: PO BC ou ABC, CO2, espuma. NUNCA use agua.</a:t>
             </a:r>
           </a:p>
         </p:txBody>
@@ -5046,7 +5091,7 @@
                   <a:srgbClr val="111827"/>
                 </a:solidFill>
               </a:rPr>
-              <a:t>           Agente: PÓ BC ou ABC, CO₂ (não condutores). NUNCA use água.</a:t>
+              <a:t>   Agente: PO BC, ABC ou CO2 (nao condutores). NUNCA use agua.</a:t>
             </a:r>
           </a:p>
         </p:txBody>
@@ -5080,7 +5125,7 @@
                   <a:srgbClr val="111827"/>
                 </a:solidFill>
               </a:rPr>
-              <a:t>CLASSE D — Metais combustíveis: magnésio, titânio, sódio.</a:t>
+              <a:t>CLASSE D — Metais combustíveis: magnesio, titanio, sodio. Po especial.</a:t>
             </a:r>
           </a:p>
         </p:txBody>
@@ -5114,7 +5159,7 @@
                   <a:srgbClr val="111827"/>
                 </a:solidFill>
               </a:rPr>
-              <a:t>           Agente: pó especial específico para o metal.</a:t>
+              <a:t>CLASSE K — Oleos e gorduras de cozinha. Extintor especifico — NUNCA agua.</a:t>
             </a:r>
           </a:p>
         </p:txBody>
@@ -5166,7 +5211,7 @@
                   <a:srgbClr val="1A56DB"/>
                 </a:solidFill>
               </a:rPr>
-              <a:t>Tipos de Extintores e Agentes Extintores</a:t>
+              <a:t>Tipos de Extintores e Agentes</a:t>
             </a:r>
           </a:p>
         </p:txBody>
@@ -5200,7 +5245,7 @@
                   <a:srgbClr val="111827"/>
                 </a:solidFill>
               </a:rPr>
-              <a:t>💧 ÁGUA PRESSURIZADA — Classe A. Age por resfriamento. Não usar em B, C ou D.</a:t>
+              <a:t>AGUA PRESSURIZADA: Classe A. Age por resfriamento. Nao usar em B, C ou D.</a:t>
             </a:r>
           </a:p>
         </p:txBody>
@@ -5234,7 +5279,7 @@
                   <a:srgbClr val="111827"/>
                 </a:solidFill>
               </a:rPr>
-              <a:t>🟡 PÓ QUÍMICO SECO BC — Classes B e C. Interrompe reação em cadeia.</a:t>
+              <a:t>PO QUIMICO SECO BC: Classes B e C. Interrompe reacao em cadeia.</a:t>
             </a:r>
           </a:p>
         </p:txBody>
@@ -5268,7 +5313,7 @@
                   <a:srgbClr val="111827"/>
                 </a:solidFill>
               </a:rPr>
-              <a:t>🟠 PÓ QUÍMICO SECO ABC — Classes A, B e C. Versátil, uso mais comum.</a:t>
+              <a:t>PO QUIMICO SECO ABC: Classes A, B e C. Mais versatil — uso mais comum.</a:t>
             </a:r>
           </a:p>
         </p:txBody>
@@ -5302,7 +5347,7 @@
                   <a:srgbClr val="111827"/>
                 </a:solidFill>
               </a:rPr>
-              <a:t>❄️  GÁS CARBÔNICO (CO₂) — Classes B e C. Não deixa resíduo. Ideal p/ TI.</a:t>
+              <a:t>GAS CARBONICO (CO2): Classes B e C. Nao deixa residuo. Ideal para TI.</a:t>
             </a:r>
           </a:p>
         </p:txBody>
@@ -5336,7 +5381,7 @@
                   <a:srgbClr val="111827"/>
                 </a:solidFill>
               </a:rPr>
-              <a:t>🟢 ESPUMA MECÂNICA — Classes A e B. Age por abafamento e resfriamento.</a:t>
+              <a:t>ESPUMA MECANICA: Classes A e B. Age por abafamento e resfriamento.</a:t>
             </a:r>
           </a:p>
         </p:txBody>
@@ -5370,7 +5415,41 @@
                   <a:srgbClr val="111827"/>
                 </a:solidFill>
               </a:rPr>
-              <a:t>⚠️  Pó ABC deixa resíduo — cause dano ao equipamento eletrônico. Prefira CO₂.</a:t>
+              <a:t>PO ESPECIAL: Classe D. Especifico para cada metal combustivel.</a:t>
+            </a:r>
+          </a:p>
+        </p:txBody>
+      </p:sp>
+      <p:sp>
+        <p:nvSpPr>
+          <p:cNvPr id="9" name="TextBox 8"/>
+          <p:cNvSpPr txBox="1"/>
+          <p:nvPr/>
+        </p:nvSpPr>
+        <p:spPr>
+          <a:xfrm>
+            <a:off x="548640" y="4325112"/>
+            <a:ext cx="11091672" cy="548640"/>
+          </a:xfrm>
+          <a:prstGeom prst="rect">
+            <a:avLst/>
+          </a:prstGeom>
+          <a:noFill/>
+        </p:spPr>
+        <p:txBody>
+          <a:bodyPr wrap="square">
+            <a:spAutoFit/>
+          </a:bodyPr>
+          <a:lstStyle/>
+          <a:p>
+            <a:pPr algn="l"/>
+            <a:r>
+              <a:rPr sz="1800" b="0">
+                <a:solidFill>
+                  <a:srgbClr val="111827"/>
+                </a:solidFill>
+              </a:rPr>
+              <a:t>Atencao: po ABC deixa residuo — pode danar equipamentos electronicos.</a:t>
             </a:r>
           </a:p>
         </p:txBody>
@@ -5422,7 +5501,7 @@
                   <a:srgbClr val="1A56DB"/>
                 </a:solidFill>
               </a:rPr>
-              <a:t>Seleção Correta do Extintor por Situação</a:t>
+              <a:t>Seleção Correta do Extintor</a:t>
             </a:r>
           </a:p>
         </p:txBody>
@@ -5456,7 +5535,7 @@
                   <a:srgbClr val="111827"/>
                 </a:solidFill>
               </a:rPr>
-              <a:t>LIXEIRA pegando fogo (papel/madeira)  → Água ou Pó ABC.</a:t>
+              <a:t>Lixeira com papel em chamas (Classe A)      → Agua ou Po ABC.</a:t>
             </a:r>
           </a:p>
         </p:txBody>
@@ -5490,7 +5569,7 @@
                   <a:srgbClr val="111827"/>
                 </a:solidFill>
               </a:rPr>
-              <a:t>Vazamento de gás inflamável (GLP)     → Pó BC ou ABC, CO₂.</a:t>
+              <a:t>Vazamento de GLP inflamado (Classe B)       → Po BC, ABC ou CO2.</a:t>
             </a:r>
           </a:p>
         </p:txBody>
@@ -5524,7 +5603,7 @@
                   <a:srgbClr val="111827"/>
                 </a:solidFill>
               </a:rPr>
-              <a:t>Curto em quadro elétrico energizado   → Pó BC, ABC ou CO₂. NUNCA água.</a:t>
+              <a:t>Curto em quadro eletrico energizado (Cl. C) → Po BC, ABC ou CO2. NUNCA agua.</a:t>
             </a:r>
           </a:p>
         </p:txBody>
@@ -5558,7 +5637,7 @@
                   <a:srgbClr val="111827"/>
                 </a:solidFill>
               </a:rPr>
-              <a:t>Incêndio em servidor / computadores   → CO₂ (sem resíduo).</a:t>
+              <a:t>Servidores e computadores                   → CO2 (sem residuo).</a:t>
             </a:r>
           </a:p>
         </p:txBody>
@@ -5592,7 +5671,7 @@
                   <a:srgbClr val="111827"/>
                 </a:solidFill>
               </a:rPr>
-              <a:t>Incêndio em depósito de combustível   → Espuma mecânica ou Pó BC.</a:t>
+              <a:t>Oleo de cozinha em alta temperatura (Cl. K) → Extintor especifico po umido.</a:t>
             </a:r>
           </a:p>
         </p:txBody>
@@ -5626,7 +5705,41 @@
                   <a:srgbClr val="111827"/>
                 </a:solidFill>
               </a:rPr>
-              <a:t>Regra de ouro: leia sempre o rótulo do extintor antes de usar.</a:t>
+              <a:t>Metal combustivel (Classe D)                → Po metalico especifico.</a:t>
+            </a:r>
+          </a:p>
+        </p:txBody>
+      </p:sp>
+      <p:sp>
+        <p:nvSpPr>
+          <p:cNvPr id="9" name="TextBox 8"/>
+          <p:cNvSpPr txBox="1"/>
+          <p:nvPr/>
+        </p:nvSpPr>
+        <p:spPr>
+          <a:xfrm>
+            <a:off x="548640" y="4325112"/>
+            <a:ext cx="11091672" cy="548640"/>
+          </a:xfrm>
+          <a:prstGeom prst="rect">
+            <a:avLst/>
+          </a:prstGeom>
+          <a:noFill/>
+        </p:spPr>
+        <p:txBody>
+          <a:bodyPr wrap="square">
+            <a:spAutoFit/>
+          </a:bodyPr>
+          <a:lstStyle/>
+          <a:p>
+            <a:pPr algn="l"/>
+            <a:r>
+              <a:rPr sz="1800" b="0">
+                <a:solidFill>
+                  <a:srgbClr val="111827"/>
+                </a:solidFill>
+              </a:rPr>
+              <a:t>REGRA DE OURO: leia o rotulo do extintor — ele indica as classes adequadas.</a:t>
             </a:r>
           </a:p>
         </p:txBody>
@@ -5712,7 +5825,7 @@
                   <a:srgbClr val="111827"/>
                 </a:solidFill>
               </a:rPr>
-              <a:t>P — PUXE o pino de segurança (lacre).</a:t>
+              <a:t>P — PUXE o pino de segurança (remove o lacre).</a:t>
             </a:r>
           </a:p>
         </p:txBody>
@@ -5746,7 +5859,7 @@
                   <a:srgbClr val="111827"/>
                 </a:solidFill>
               </a:rPr>
-              <a:t>A — APONTE o bico/mangueira para a BASE das chamas, não para o topo.</a:t>
+              <a:t>A — APONTE o bico/mangueira para a BASE das chamas, nao para o topo.</a:t>
             </a:r>
           </a:p>
         </p:txBody>
@@ -5780,7 +5893,7 @@
                   <a:srgbClr val="111827"/>
                 </a:solidFill>
               </a:rPr>
-              <a:t>S — APERTE (SQUEEZE) o gatilho com firmeza e de forma contínua.</a:t>
+              <a:t>S — APERTE (Squeeze) o gatilho com firmeza e de forma continua.</a:t>
             </a:r>
           </a:p>
         </p:txBody>
@@ -5814,7 +5927,7 @@
                   <a:srgbClr val="111827"/>
                 </a:solidFill>
               </a:rPr>
-              <a:t>S — VARRA (SWEEP) da esquerda para a direita, cobrindo toda a base.</a:t>
+              <a:t>S — VARRA (Sweep) da esquerda para a direita cobrindo toda a base.</a:t>
             </a:r>
           </a:p>
         </p:txBody>
@@ -5848,7 +5961,7 @@
                   <a:srgbClr val="111827"/>
                 </a:solidFill>
               </a:rPr>
-              <a:t>Distância segura: entre 1,5 m e 3 m da chama (veja no rótulo).</a:t>
+              <a:t>Distancia segura: entre 1,5 m e 3 m da chama (consulte o rotulo).</a:t>
             </a:r>
           </a:p>
         </p:txBody>
@@ -5882,7 +5995,41 @@
                   <a:srgbClr val="111827"/>
                 </a:solidFill>
               </a:rPr>
-              <a:t>⚠️  Posicione-se com o vento NAS COSTAS. Tenha sempre rota de fuga.</a:t>
+              <a:t>Posicione-se com o VENTO NAS COSTAS — evita que o agente volte em voce.</a:t>
+            </a:r>
+          </a:p>
+        </p:txBody>
+      </p:sp>
+      <p:sp>
+        <p:nvSpPr>
+          <p:cNvPr id="9" name="TextBox 8"/>
+          <p:cNvSpPr txBox="1"/>
+          <p:nvPr/>
+        </p:nvSpPr>
+        <p:spPr>
+          <a:xfrm>
+            <a:off x="548640" y="4325112"/>
+            <a:ext cx="11091672" cy="548640"/>
+          </a:xfrm>
+          <a:prstGeom prst="rect">
+            <a:avLst/>
+          </a:prstGeom>
+          <a:noFill/>
+        </p:spPr>
+        <p:txBody>
+          <a:bodyPr wrap="square">
+            <a:spAutoFit/>
+          </a:bodyPr>
+          <a:lstStyle/>
+          <a:p>
+            <a:pPr algn="l"/>
+            <a:r>
+              <a:rPr sz="1800" b="0">
+                <a:solidFill>
+                  <a:srgbClr val="111827"/>
+                </a:solidFill>
+              </a:rPr>
+              <a:t>Mantenha SEMPRE uma rota de fuga livre atras de voce.</a:t>
             </a:r>
           </a:p>
         </p:txBody>
@@ -5934,7 +6081,7 @@
                   <a:srgbClr val="1A56DB"/>
                 </a:solidFill>
               </a:rPr>
-              <a:t>Inspeção e Manutenção dos Extintores (NBR 12962)</a:t>
+              <a:t>Inspeção, Manutenção e Validade</a:t>
             </a:r>
           </a:p>
         </p:txBody>
@@ -5968,7 +6115,7 @@
                   <a:srgbClr val="111827"/>
                 </a:solidFill>
               </a:rPr>
-              <a:t>INSPEÇÃO MENSAL (visual) — verificar: lacre intacto, pressão no manômetro (zona verde),</a:t>
+              <a:t>INSPECAO MENSAL (visual) — pelo proprio funcionário treinado:</a:t>
             </a:r>
           </a:p>
         </p:txBody>
@@ -6002,7 +6149,7 @@
                   <a:srgbClr val="111827"/>
                 </a:solidFill>
               </a:rPr>
-              <a:t>  ausência de danos, corrosão, validade da carga e local de instalação acessível.</a:t>
+              <a:t>   Lacre intacto, manometro na zona VERDE, sem danos ou corrosao.</a:t>
             </a:r>
           </a:p>
         </p:txBody>
@@ -6036,7 +6183,7 @@
                   <a:srgbClr val="111827"/>
                 </a:solidFill>
               </a:rPr>
-              <a:t>MANUTENÇÃO ANUAL — realizada por empresa credenciada pelo INMETRO.</a:t>
+              <a:t>   Local acessível, sinalizado e desobstruido.</a:t>
             </a:r>
           </a:p>
         </p:txBody>
@@ -6070,7 +6217,7 @@
                   <a:srgbClr val="111827"/>
                 </a:solidFill>
               </a:rPr>
-              <a:t>  Verificação interna, recarga e emissão de laudo técnico.</a:t>
+              <a:t>MANUTENCAO ANUAL — empresa credenciada pelo INMETRO.</a:t>
             </a:r>
           </a:p>
         </p:txBody>
@@ -6104,7 +6251,7 @@
                   <a:srgbClr val="111827"/>
                 </a:solidFill>
               </a:rPr>
-              <a:t>TESTE HIDROSTÁTICO — a cada 5 anos para cilindros de aço.</a:t>
+              <a:t>   Verificacao interna, recarga, teste do mecanismo e laudo técnico.</a:t>
             </a:r>
           </a:p>
         </p:txBody>
@@ -6138,7 +6285,7 @@
                   <a:srgbClr val="111827"/>
                 </a:solidFill>
               </a:rPr>
-              <a:t>  Após qualquer uso — mesmo parcial — o extintor deve ser recarregado.</a:t>
+              <a:t>TESTE HIDROSTATICO — a cada 5 anos para cilindros de aco.</a:t>
             </a:r>
           </a:p>
         </p:txBody>
@@ -6172,7 +6319,41 @@
                   <a:srgbClr val="111827"/>
                 </a:solidFill>
               </a:rPr>
-              <a:t>⚠️  Extintor descarregado ou com manômetro na zona vermelha é inoperante.</a:t>
+              <a:t>APOS QUALQUER USO (mesmo parcial) — recarregar imediatamente.</a:t>
+            </a:r>
+          </a:p>
+        </p:txBody>
+      </p:sp>
+      <p:sp>
+        <p:nvSpPr>
+          <p:cNvPr id="10" name="TextBox 9"/>
+          <p:cNvSpPr txBox="1"/>
+          <p:nvPr/>
+        </p:nvSpPr>
+        <p:spPr>
+          <a:xfrm>
+            <a:off x="548640" y="4855464"/>
+            <a:ext cx="11091672" cy="548640"/>
+          </a:xfrm>
+          <a:prstGeom prst="rect">
+            <a:avLst/>
+          </a:prstGeom>
+          <a:noFill/>
+        </p:spPr>
+        <p:txBody>
+          <a:bodyPr wrap="square">
+            <a:spAutoFit/>
+          </a:bodyPr>
+          <a:lstStyle/>
+          <a:p>
+            <a:pPr algn="l"/>
+            <a:r>
+              <a:rPr sz="1800" b="0">
+                <a:solidFill>
+                  <a:srgbClr val="111827"/>
+                </a:solidFill>
+              </a:rPr>
+              <a:t>Extintor com manometro na zona vermelha = INOPERANTE.</a:t>
             </a:r>
           </a:p>
         </p:txBody>
@@ -6224,7 +6405,7 @@
                   <a:srgbClr val="1A56DB"/>
                 </a:solidFill>
               </a:rPr>
-              <a:t>Localização, Sinalização e Quantidade (NR-23)</a:t>
+              <a:t>Localização e Sinalização (NR-23 / NBR 12693)</a:t>
             </a:r>
           </a:p>
         </p:txBody>
@@ -6258,7 +6439,7 @@
                   <a:srgbClr val="111827"/>
                 </a:solidFill>
               </a:rPr>
-              <a:t>ALTURA: parte inferior do extintor a no máximo 1,60 m do piso.</a:t>
+              <a:t>ALTURA: parte inferior do extintor a no maximo 1,60 m do piso.</a:t>
             </a:r>
           </a:p>
         </p:txBody>
@@ -6292,7 +6473,7 @@
                   <a:srgbClr val="111827"/>
                 </a:solidFill>
               </a:rPr>
-              <a:t>DISTÂNCIA MÁXIMA a percorrer:</a:t>
+              <a:t>DISTANCIA MAXIMA a percorrer:</a:t>
             </a:r>
           </a:p>
         </p:txBody>
@@ -6326,7 +6507,7 @@
                   <a:srgbClr val="111827"/>
                 </a:solidFill>
               </a:rPr>
-              <a:t>  • Classe A: até 15 metros.</a:t>
+              <a:t>   Classe A: ate 15 metros.</a:t>
             </a:r>
           </a:p>
         </p:txBody>
@@ -6360,7 +6541,7 @@
                   <a:srgbClr val="111827"/>
                 </a:solidFill>
               </a:rPr>
-              <a:t>  • Classes B e C: até 10 metros.</a:t>
+              <a:t>   Classes B e C: ate 10 metros.</a:t>
             </a:r>
           </a:p>
         </p:txBody>
@@ -6394,7 +6575,7 @@
                   <a:srgbClr val="111827"/>
                 </a:solidFill>
               </a:rPr>
-              <a:t>SINALIZAÇÃO: placa fotoluminescente de identificação obrigatória.</a:t>
+              <a:t>SINALIZACAO: placa fotoluminescente obrigatoria acima do extintor.</a:t>
             </a:r>
           </a:p>
         </p:txBody>
@@ -6428,7 +6609,7 @@
                   <a:srgbClr val="111827"/>
                 </a:solidFill>
               </a:rPr>
-              <a:t>ACESSO: nunca obstruir com móveis, equipamentos ou outros objetos.</a:t>
+              <a:t>ACESSO: nunca obstruir com moveis, caixas ou outros objetos.</a:t>
             </a:r>
           </a:p>
         </p:txBody>
@@ -6462,7 +6643,7 @@
                   <a:srgbClr val="111827"/>
                 </a:solidFill>
               </a:rPr>
-              <a:t>QUANTIDADE: calculada conforme área, ocupação e risco do ambiente (NBR 12693).</a:t>
+              <a:t>QUANTIDADE: calculada pela NBR 12693 conforme area e risco do ambiente.</a:t>
             </a:r>
           </a:p>
         </p:txBody>
@@ -6514,7 +6695,7 @@
                   <a:srgbClr val="1A56DB"/>
                 </a:solidFill>
               </a:rPr>
-              <a:t>NR-23 — Proteção Contra Incêndios</a:t>
+              <a:t>NR-23 — Proteção Contra Incêndios no Trabalho</a:t>
             </a:r>
           </a:p>
         </p:txBody>
@@ -6548,7 +6729,7 @@
                   <a:srgbClr val="111827"/>
                 </a:solidFill>
               </a:rPr>
-              <a:t>A NR-23 estabelece obrigações do empregador em proteção contra incêndio:</a:t>
+              <a:t>Obrigacoes do empregador:</a:t>
             </a:r>
           </a:p>
         </p:txBody>
@@ -6582,7 +6763,7 @@
                   <a:srgbClr val="111827"/>
                 </a:solidFill>
               </a:rPr>
-              <a:t>• Saídas de emergência suficientes e desobstruídas.</a:t>
+              <a:t>• Saidas de emergencia suficientes, sinalizadas e SEMPRE desobstruidas.</a:t>
             </a:r>
           </a:p>
         </p:txBody>
@@ -6616,7 +6797,7 @@
                   <a:srgbClr val="111827"/>
                 </a:solidFill>
               </a:rPr>
-              <a:t>• Equipamentos de combate a incêndio em número e tipo adequados.</a:t>
+              <a:t>• Extintores adequados ao risco em numero e tipo corretos.</a:t>
             </a:r>
           </a:p>
         </p:txBody>
@@ -6650,7 +6831,7 @@
                   <a:srgbClr val="111827"/>
                 </a:solidFill>
               </a:rPr>
-              <a:t>• Treinamento de todos os trabalhadores no uso dos extintores.</a:t>
+              <a:t>• BRIGADA DE INCENDIO: funcionarios treinados para resposta inicial.</a:t>
             </a:r>
           </a:p>
         </p:txBody>
@@ -6684,7 +6865,7 @@
                   <a:srgbClr val="111827"/>
                 </a:solidFill>
               </a:rPr>
-              <a:t>• Brigada de incêndio conforme o porte e risco da empresa.</a:t>
+              <a:t>• Treinamento anual da brigada com simulado pratico.</a:t>
             </a:r>
           </a:p>
         </p:txBody>
@@ -6718,7 +6899,7 @@
                   <a:srgbClr val="111827"/>
                 </a:solidFill>
               </a:rPr>
-              <a:t>• Plano de emergência e simulados periódicos.</a:t>
+              <a:t>• PPCI aprovado pelo Corpo de Bombeiros Militar.</a:t>
             </a:r>
           </a:p>
         </p:txBody>
@@ -6752,7 +6933,41 @@
                   <a:srgbClr val="111827"/>
                 </a:solidFill>
               </a:rPr>
-              <a:t>⚠️  A fiscalização é feita pelo Corpo de Bombeiros e pelo MTE.</a:t>
+              <a:t>• Plano de emergencia e evacuacao com rotas de fuga sinalizadas.</a:t>
+            </a:r>
+          </a:p>
+        </p:txBody>
+      </p:sp>
+      <p:sp>
+        <p:nvSpPr>
+          <p:cNvPr id="10" name="TextBox 9"/>
+          <p:cNvSpPr txBox="1"/>
+          <p:nvPr/>
+        </p:nvSpPr>
+        <p:spPr>
+          <a:xfrm>
+            <a:off x="548640" y="4855464"/>
+            <a:ext cx="11091672" cy="548640"/>
+          </a:xfrm>
+          <a:prstGeom prst="rect">
+            <a:avLst/>
+          </a:prstGeom>
+          <a:noFill/>
+        </p:spPr>
+        <p:txBody>
+          <a:bodyPr wrap="square">
+            <a:spAutoFit/>
+          </a:bodyPr>
+          <a:lstStyle/>
+          <a:p>
+            <a:pPr algn="l"/>
+            <a:r>
+              <a:rPr sz="1800" b="0">
+                <a:solidFill>
+                  <a:srgbClr val="111827"/>
+                </a:solidFill>
+              </a:rPr>
+              <a:t>Fiscalizacao: Corpo de Bombeiros + Ministerio do Trabalho e Emprego.</a:t>
             </a:r>
           </a:p>
         </p:txBody>
